--- a/volantino-a6-canva.pptx
+++ b/volantino-a6-canva.pptx
@@ -844,7 +844,7 @@
                 </a:solidFill>
                 <a:latin typeface="Arial"/>
               </a:rPr>
-              <a:t xml:space="preserve">Su appuntamento a Prati e Montesacro.</a:t>
+              <a:t xml:space="preserve">Su appuntamento a Prati e Monte Sacro.</a:t>
             </a:r>
             <a:endParaRPr lang="it-IT" sz="740"/>
           </a:p>
@@ -2389,7 +2389,7 @@
       </p:sp>
       <p:sp>
         <p:nvSpPr>
-          <p:cNvPr id="42" name="Sede MONTESACRO · Jaqueline"/>
+          <p:cNvPr id="42" name="Sede Monte Sacro · Jaqueline"/>
           <p:cNvSpPr/>
           <p:nvPr/>
         </p:nvSpPr>
@@ -2413,7 +2413,7 @@
       </p:sp>
       <p:sp>
         <p:nvSpPr>
-          <p:cNvPr id="43" name="Nome sede MONTESACRO · Jaqueline"/>
+          <p:cNvPr id="43" name="Nome sede Monte Sacro · Jaqueline"/>
           <p:cNvSpPr txBox="1"/>
           <p:nvPr/>
         </p:nvSpPr>
@@ -2443,21 +2443,21 @@
               </a:spcAft>
             </a:pPr>
             <a:r>
-              <a:rPr lang="it-IT" sz="620" b="1" dirty="0">
+              <a:rPr lang="it-IT" sz="570" b="1" dirty="0">
                 <a:solidFill>
                   <a:srgbClr val="29463B"/>
                 </a:solidFill>
                 <a:latin typeface="Arial"/>
               </a:rPr>
-              <a:t xml:space="preserve">MONTESACRO · Jaqueline</a:t>
-            </a:r>
-            <a:endParaRPr lang="it-IT" sz="620"/>
-          </a:p>
-        </p:txBody>
-      </p:sp>
-      <p:sp>
-        <p:nvSpPr>
-          <p:cNvPr id="44" name="Indirizzo MONTESACRO · Jaqueline"/>
+              <a:t xml:space="preserve">Monte Sacro · Jaqueline</a:t>
+            </a:r>
+            <a:endParaRPr lang="it-IT" sz="570"/>
+          </a:p>
+        </p:txBody>
+      </p:sp>
+      <p:sp>
+        <p:nvSpPr>
+          <p:cNvPr id="44" name="Indirizzo Monte Sacro · Jaqueline"/>
           <p:cNvSpPr txBox="1"/>
           <p:nvPr/>
         </p:nvSpPr>
@@ -2533,7 +2533,7 @@
                 </a:solidFill>
                 <a:latin typeface="Arial"/>
               </a:rPr>
-              <a:t xml:space="preserve">Montesacro, Roma</a:t>
+              <a:t xml:space="preserve">Monte Sacro, Roma</a:t>
             </a:r>
             <a:endParaRPr lang="it-IT" sz="610"/>
           </a:p>
@@ -2577,7 +2577,7 @@
                 </a:solidFill>
                 <a:latin typeface="Arial"/>
               </a:rPr>
-              <a:t xml:space="preserve">MONTESACRO: per accedere è richiesta l’adesione ad APS Jaqueline e la quota</a:t>
+              <a:t xml:space="preserve">Monte Sacro: per accedere è richiesta l’adesione ad APS Jaqueline e la quota</a:t>
             </a:r>
             <a:endParaRPr lang="it-IT" sz="550"/>
           </a:p>
